--- a/exports/quarto/pptx/10_DirectoryStructure.pptx
+++ b/exports/quarto/pptx/10_DirectoryStructure.pptx
@@ -3186,7 +3186,7 @@
             </a:pPr>
             <a:r>
               <a:rPr/>
-              <a:t>March 31, 2026</a:t>
+              <a:t>April 2, 2026</a:t>
             </a:r>
           </a:p>
         </p:txBody>
@@ -4222,6 +4222,130 @@
                       <a:r>
                         <a:rPr/>
                         <a:t>Canonical glossary</a:t>
+                      </a:r>
+                    </a:p>
+                  </a:txBody>
+                </a:tc>
+              </a:tr>
+              <a:tr h="0">
+                <a:tc>
+                  <a:txBody>
+                    <a:bodyPr/>
+                    <a:lstStyle/>
+                    <a:p>
+                      <a:pPr lvl="0" indent="0" marL="0">
+                        <a:buNone/>
+                      </a:pPr>
+                      <a:r>
+                        <a:rPr/>
+                        <a:t>—</a:t>
+                      </a:r>
+                    </a:p>
+                  </a:txBody>
+                </a:tc>
+                <a:tc>
+                  <a:txBody>
+                    <a:bodyPr/>
+                    <a:lstStyle/>
+                    <a:p>
+                      <a:pPr lvl="0" indent="0" marL="0">
+                        <a:buNone/>
+                      </a:pPr>
+                      <a:r>
+                        <a:rPr/>
+                        <a:t>/adapters</a:t>
+                      </a:r>
+                    </a:p>
+                  </a:txBody>
+                </a:tc>
+                <a:tc>
+                  <a:txBody>
+                    <a:bodyPr/>
+                    <a:lstStyle/>
+                    <a:p>
+                      <a:pPr lvl="0" indent="0" marL="0">
+                        <a:buNone/>
+                      </a:pPr>
+                      <a:r>
+                        <a:rPr/>
+                        <a:t>Adapter Layer</a:t>
+                      </a:r>
+                    </a:p>
+                  </a:txBody>
+                </a:tc>
+                <a:tc>
+                  <a:txBody>
+                    <a:bodyPr/>
+                    <a:lstStyle/>
+                    <a:p>
+                      <a:pPr lvl="0" indent="0" marL="0">
+                        <a:buNone/>
+                      </a:pPr>
+                      <a:r>
+                        <a:rPr/>
+                        <a:t>BaseAdapter ABC and adapter registry</a:t>
+                      </a:r>
+                    </a:p>
+                  </a:txBody>
+                </a:tc>
+              </a:tr>
+              <a:tr h="0">
+                <a:tc>
+                  <a:txBody>
+                    <a:bodyPr/>
+                    <a:lstStyle/>
+                    <a:p>
+                      <a:pPr lvl="0" indent="0" marL="0">
+                        <a:buNone/>
+                      </a:pPr>
+                      <a:r>
+                        <a:rPr/>
+                        <a:t>—</a:t>
+                      </a:r>
+                    </a:p>
+                  </a:txBody>
+                </a:tc>
+                <a:tc>
+                  <a:txBody>
+                    <a:bodyPr/>
+                    <a:lstStyle/>
+                    <a:p>
+                      <a:pPr lvl="0" indent="0" marL="0">
+                        <a:buNone/>
+                      </a:pPr>
+                      <a:r>
+                        <a:rPr/>
+                        <a:t>/docs/adapters</a:t>
+                      </a:r>
+                    </a:p>
+                  </a:txBody>
+                </a:tc>
+                <a:tc>
+                  <a:txBody>
+                    <a:bodyPr/>
+                    <a:lstStyle/>
+                    <a:p>
+                      <a:pPr lvl="0" indent="0" marL="0">
+                        <a:buNone/>
+                      </a:pPr>
+                      <a:r>
+                        <a:rPr/>
+                        <a:t>Adapter Layer</a:t>
+                      </a:r>
+                    </a:p>
+                  </a:txBody>
+                </a:tc>
+                <a:tc>
+                  <a:txBody>
+                    <a:bodyPr/>
+                    <a:lstStyle/>
+                    <a:p>
+                      <a:pPr lvl="0" indent="0" marL="0">
+                        <a:buNone/>
+                      </a:pPr>
+                      <a:r>
+                        <a:rPr/>
+                        <a:t>Adapter contract, definitions, and diagrams</a:t>
                       </a:r>
                     </a:p>
                   </a:txBody>
@@ -4947,6 +5071,68 @@
                   </a:txBody>
                 </a:tc>
               </a:tr>
+              <a:tr h="0">
+                <a:tc>
+                  <a:txBody>
+                    <a:bodyPr/>
+                    <a:lstStyle/>
+                    <a:p>
+                      <a:pPr lvl="0" indent="0" marL="0">
+                        <a:buNone/>
+                      </a:pPr>
+                      <a:r>
+                        <a:rPr/>
+                        <a:t>1.1</a:t>
+                      </a:r>
+                    </a:p>
+                  </a:txBody>
+                </a:tc>
+                <a:tc>
+                  <a:txBody>
+                    <a:bodyPr/>
+                    <a:lstStyle/>
+                    <a:p>
+                      <a:pPr lvl="0" indent="0" marL="0">
+                        <a:buNone/>
+                      </a:pPr>
+                      <a:r>
+                        <a:rPr/>
+                        <a:t>2026-04</a:t>
+                      </a:r>
+                    </a:p>
+                  </a:txBody>
+                </a:tc>
+                <a:tc>
+                  <a:txBody>
+                    <a:bodyPr/>
+                    <a:lstStyle/>
+                    <a:p>
+                      <a:pPr lvl="0" indent="0" marL="0">
+                        <a:buNone/>
+                      </a:pPr>
+                      <a:r>
+                        <a:rPr/>
+                        <a:t>UIAO Adapter Layer</a:t>
+                      </a:r>
+                    </a:p>
+                  </a:txBody>
+                </a:tc>
+                <a:tc>
+                  <a:txBody>
+                    <a:bodyPr/>
+                    <a:lstStyle/>
+                    <a:p>
+                      <a:pPr lvl="0" indent="0" marL="0">
+                        <a:buNone/>
+                      </a:pPr>
+                      <a:r>
+                        <a:rPr/>
+                        <a:t>Added /adapters/ and /docs/adapters/ to directory layout and canonical table</a:t>
+                      </a:r>
+                    </a:p>
+                  </a:txBody>
+                </a:tc>
+              </a:tr>
             </a:tbl>
           </a:graphicData>
         </a:graphic>
@@ -5939,7 +6125,20 @@
             </a:pPr>
             <a:r>
               <a:rPr/>
-              <a:t>The directory structure operationalizes the Seven Core Concepts:</a:t>
+              <a:t>The directory structure operationalizes the Eight Core Concepts:</a:t>
+            </a:r>
+          </a:p>
+          <a:p>
+            <a:pPr lvl="0" indent="-342900" marL="342900">
+              <a:buAutoNum type="arabicPeriod"/>
+            </a:pPr>
+            <a:r>
+              <a:rPr b="1"/>
+              <a:t>Single Source of Truth (SSOT)</a:t>
+            </a:r>
+            <a:r>
+              <a:rPr/>
+              <a:t> — UIAO operates on the principle that every claim has one authoritative origin. All other representations are pointers, not copies. This ensures provenance, prevents drift, and enables federated truth resolution across boundaries.</a:t>
             </a:r>
           </a:p>
           <a:p>
@@ -6137,7 +6336,14 @@
    08_ModernizationTimeline.md
    09_CrosswalkIndex.md
    10_DirectoryStructure.md
-   11_GlossaryAndDefinitions.md</a:t>
+   11_GlossaryAndDefinitions.md
+/adapters
+    __init__.py              # Adapter registry
+    base_adapter.py          # Abstract base class (adapter contract)
+/docs/adapters
+    canonical-definition-of-a-uiao-adapter.md
+    adapter-responsibilities-diagram-set.md
+    adapter-contract.md</a:t>
             </a:r>
           </a:p>
           <a:p>
